--- a/reports/BRANCH_MATARAM_PERFORMANCE_SUMMARY_20260902_INARA.pptx
+++ b/reports/BRANCH_MATARAM_PERFORMANCE_SUMMARY_20260902_INARA.pptx
@@ -12495,7 +12495,7 @@
                 </a:solidFill>
                 <a:latin typeface="Arial"/>
               </a:rPr>
-              <a:t>41</a:t>
+              <a:t>45</a:t>
             </a:r>
           </a:p>
         </p:txBody>
@@ -12526,11 +12526,11 @@
             <a:r>
               <a:rPr sz="1200" b="1" i="0">
                 <a:solidFill>
-                  <a:srgbClr val="D73527"/>
+                  <a:srgbClr val="137D3F"/>
                 </a:solidFill>
                 <a:latin typeface="Arial"/>
               </a:rPr>
-              <a:t>-77,7%</a:t>
+              <a:t>+800,0%</a:t>
             </a:r>
           </a:p>
         </p:txBody>
@@ -12565,7 +12565,7 @@
                 </a:solidFill>
                 <a:latin typeface="Arial"/>
               </a:rPr>
-              <a:t>MTD-1: 184   Δ -143</a:t>
+              <a:t>MTD-1: 5   Δ 40</a:t>
             </a:r>
           </a:p>
         </p:txBody>
@@ -12682,7 +12682,7 @@
                 </a:solidFill>
                 <a:latin typeface="Arial"/>
               </a:rPr>
-              <a:t>399</a:t>
+              <a:t>422</a:t>
             </a:r>
           </a:p>
         </p:txBody>
@@ -12713,11 +12713,11 @@
             <a:r>
               <a:rPr sz="1200" b="1" i="0">
                 <a:solidFill>
-                  <a:srgbClr val="D73527"/>
+                  <a:srgbClr val="137D3F"/>
                 </a:solidFill>
                 <a:latin typeface="Arial"/>
               </a:rPr>
-              <a:t>-93,1%</a:t>
+              <a:t>+5175,0%</a:t>
             </a:r>
           </a:p>
         </p:txBody>
@@ -12752,7 +12752,7 @@
                 </a:solidFill>
                 <a:latin typeface="Arial"/>
               </a:rPr>
-              <a:t>MTD-1: 5.810   Δ -5.411</a:t>
+              <a:t>MTD-1: 8   Δ 414</a:t>
             </a:r>
           </a:p>
         </p:txBody>
@@ -13888,7 +13888,7 @@
                           </a:solidFill>
                           <a:latin typeface="Arial"/>
                         </a:rPr>
-                        <a:t>97</a:t>
+                        <a:t>4</a:t>
                       </a:r>
                     </a:p>
                   </a:txBody>
@@ -13935,7 +13935,7 @@
                           </a:solidFill>
                           <a:latin typeface="Arial"/>
                         </a:rPr>
-                        <a:t>25</a:t>
+                        <a:t>28</a:t>
                       </a:r>
                     </a:p>
                   </a:txBody>
@@ -13978,17 +13978,17 @@
                       <a:r>
                         <a:rPr sz="1050" b="0">
                           <a:solidFill>
-                            <a:srgbClr val="D73527"/>
-                          </a:solidFill>
-                          <a:latin typeface="Arial"/>
-                        </a:rPr>
-                        <a:t>-74,2%</a:t>
-                      </a:r>
-                    </a:p>
-                  </a:txBody>
-                  <a:tcPr marL="27432" marR="27432" marT="0" marB="0">
-                    <a:solidFill>
-                      <a:srgbClr val="FBE9E7"/>
+                            <a:srgbClr val="137D3F"/>
+                          </a:solidFill>
+                          <a:latin typeface="Arial"/>
+                        </a:rPr>
+                        <a:t>+600,0%</a:t>
+                      </a:r>
+                    </a:p>
+                  </a:txBody>
+                  <a:tcPr marL="27432" marR="27432" marT="0" marB="0">
+                    <a:solidFill>
+                      <a:srgbClr val="E5F4EA"/>
                     </a:solidFill>
                     <a:lnL w="9000" cap="flat" cmpd="sng" algn="ctr">
                       <a:solidFill>
@@ -14029,7 +14029,7 @@
                           </a:solidFill>
                           <a:latin typeface="Arial"/>
                         </a:rPr>
-                        <a:t>2.410</a:t>
+                        <a:t>5</a:t>
                       </a:r>
                     </a:p>
                   </a:txBody>
@@ -14076,7 +14076,7 @@
                           </a:solidFill>
                           <a:latin typeface="Arial"/>
                         </a:rPr>
-                        <a:t>202</a:t>
+                        <a:t>210</a:t>
                       </a:r>
                     </a:p>
                   </a:txBody>
@@ -14119,17 +14119,17 @@
                       <a:r>
                         <a:rPr sz="1050" b="0">
                           <a:solidFill>
-                            <a:srgbClr val="D73527"/>
-                          </a:solidFill>
-                          <a:latin typeface="Arial"/>
-                        </a:rPr>
-                        <a:t>-91,6%</a:t>
-                      </a:r>
-                    </a:p>
-                  </a:txBody>
-                  <a:tcPr marL="27432" marR="27432" marT="0" marB="0">
-                    <a:solidFill>
-                      <a:srgbClr val="FBE9E7"/>
+                            <a:srgbClr val="137D3F"/>
+                          </a:solidFill>
+                          <a:latin typeface="Arial"/>
+                        </a:rPr>
+                        <a:t>+4100,0%</a:t>
+                      </a:r>
+                    </a:p>
+                  </a:txBody>
+                  <a:tcPr marL="27432" marR="27432" marT="0" marB="0">
+                    <a:solidFill>
+                      <a:srgbClr val="E5F4EA"/>
                     </a:solidFill>
                     <a:lnL w="9000" cap="flat" cmpd="sng" algn="ctr">
                       <a:solidFill>
@@ -14548,7 +14548,7 @@
                           </a:solidFill>
                           <a:latin typeface="Arial"/>
                         </a:rPr>
-                        <a:t>87</a:t>
+                        <a:t>1</a:t>
                       </a:r>
                     </a:p>
                   </a:txBody>
@@ -14595,7 +14595,7 @@
                           </a:solidFill>
                           <a:latin typeface="Arial"/>
                         </a:rPr>
-                        <a:t>16</a:t>
+                        <a:t>17</a:t>
                       </a:r>
                     </a:p>
                   </a:txBody>
@@ -14638,17 +14638,17 @@
                       <a:r>
                         <a:rPr sz="1050" b="0">
                           <a:solidFill>
-                            <a:srgbClr val="D73527"/>
-                          </a:solidFill>
-                          <a:latin typeface="Arial"/>
-                        </a:rPr>
-                        <a:t>-81,6%</a:t>
-                      </a:r>
-                    </a:p>
-                  </a:txBody>
-                  <a:tcPr marL="27432" marR="27432" marT="0" marB="0">
-                    <a:solidFill>
-                      <a:srgbClr val="FBE9E7"/>
+                            <a:srgbClr val="137D3F"/>
+                          </a:solidFill>
+                          <a:latin typeface="Arial"/>
+                        </a:rPr>
+                        <a:t>+1600,0%</a:t>
+                      </a:r>
+                    </a:p>
+                  </a:txBody>
+                  <a:tcPr marL="27432" marR="27432" marT="0" marB="0">
+                    <a:solidFill>
+                      <a:srgbClr val="E5F4EA"/>
                     </a:solidFill>
                     <a:lnL w="9000" cap="flat" cmpd="sng" algn="ctr">
                       <a:solidFill>
@@ -14689,7 +14689,7 @@
                           </a:solidFill>
                           <a:latin typeface="Arial"/>
                         </a:rPr>
-                        <a:t>3.400</a:t>
+                        <a:t>3</a:t>
                       </a:r>
                     </a:p>
                   </a:txBody>
@@ -14736,7 +14736,7 @@
                           </a:solidFill>
                           <a:latin typeface="Arial"/>
                         </a:rPr>
-                        <a:t>197</a:t>
+                        <a:t>212</a:t>
                       </a:r>
                     </a:p>
                   </a:txBody>
@@ -14779,17 +14779,17 @@
                       <a:r>
                         <a:rPr sz="1050" b="0">
                           <a:solidFill>
-                            <a:srgbClr val="D73527"/>
-                          </a:solidFill>
-                          <a:latin typeface="Arial"/>
-                        </a:rPr>
-                        <a:t>-94,2%</a:t>
-                      </a:r>
-                    </a:p>
-                  </a:txBody>
-                  <a:tcPr marL="27432" marR="27432" marT="0" marB="0">
-                    <a:solidFill>
-                      <a:srgbClr val="FBE9E7"/>
+                            <a:srgbClr val="137D3F"/>
+                          </a:solidFill>
+                          <a:latin typeface="Arial"/>
+                        </a:rPr>
+                        <a:t>+6966,7%</a:t>
+                      </a:r>
+                    </a:p>
+                  </a:txBody>
+                  <a:tcPr marL="27432" marR="27432" marT="0" marB="0">
+                    <a:solidFill>
+                      <a:srgbClr val="E5F4EA"/>
                     </a:solidFill>
                     <a:lnL w="9000" cap="flat" cmpd="sng" algn="ctr">
                       <a:solidFill>
@@ -22943,7 +22943,7 @@
                 </a:solidFill>
                 <a:latin typeface="Arial"/>
               </a:rPr>
-              <a:t>1.241</a:t>
+              <a:t>1.242</a:t>
             </a:r>
           </a:p>
         </p:txBody>
@@ -23165,7 +23165,7 @@
                 </a:solidFill>
                 <a:latin typeface="Arial"/>
               </a:rPr>
-              <a:t>1.411</a:t>
+              <a:t>1.421</a:t>
             </a:r>
           </a:p>
         </p:txBody>
@@ -25471,7 +25471,7 @@
                           </a:solidFill>
                           <a:latin typeface="Arial"/>
                         </a:rPr>
-                        <a:t>BAIQ YULI INDRAYANI</a:t>
+                        <a:t>Ahmad Najamudin</a:t>
                       </a:r>
                     </a:p>
                   </a:txBody>
@@ -25565,7 +25565,7 @@
                           </a:solidFill>
                           <a:latin typeface="Arial"/>
                         </a:rPr>
-                        <a:t>1</a:t>
+                        <a:t>2</a:t>
                       </a:r>
                     </a:p>
                   </a:txBody>
@@ -25612,7 +25612,7 @@
                           </a:solidFill>
                           <a:latin typeface="Arial"/>
                         </a:rPr>
-                        <a:t>2</a:t>
+                        <a:t>4</a:t>
                       </a:r>
                     </a:p>
                   </a:txBody>
@@ -25659,7 +25659,7 @@
                           </a:solidFill>
                           <a:latin typeface="Arial"/>
                         </a:rPr>
-                        <a:t>1,0</a:t>
+                        <a:t>2,0</a:t>
                       </a:r>
                     </a:p>
                   </a:txBody>
@@ -25755,7 +25755,7 @@
                           </a:solidFill>
                           <a:latin typeface="Arial"/>
                         </a:rPr>
-                        <a:t>DODIMAN</a:t>
+                        <a:t>BAIQ YULI INDRAYANI</a:t>
                       </a:r>
                     </a:p>
                   </a:txBody>
@@ -25802,7 +25802,7 @@
                           </a:solidFill>
                           <a:latin typeface="Arial"/>
                         </a:rPr>
-                        <a:t>Sumbawa Barat - Sumbawa Timur</a:t>
+                        <a:t>Lombok</a:t>
                       </a:r>
                     </a:p>
                   </a:txBody>
@@ -26039,7 +26039,7 @@
                           </a:solidFill>
                           <a:latin typeface="Arial"/>
                         </a:rPr>
-                        <a:t>Abdul Hanan</a:t>
+                        <a:t>Bagindo nofan</a:t>
                       </a:r>
                     </a:p>
                   </a:txBody>
@@ -26323,7 +26323,7 @@
                           </a:solidFill>
                           <a:latin typeface="Arial"/>
                         </a:rPr>
-                        <a:t>Ahmad Najamudin</a:t>
+                        <a:t>DODIMAN</a:t>
                       </a:r>
                     </a:p>
                   </a:txBody>
@@ -26370,7 +26370,7 @@
                           </a:solidFill>
                           <a:latin typeface="Arial"/>
                         </a:rPr>
-                        <a:t>Lombok</a:t>
+                        <a:t>Sumbawa Barat - Sumbawa Timur</a:t>
                       </a:r>
                     </a:p>
                   </a:txBody>
@@ -26417,6 +26417,53 @@
                           </a:solidFill>
                           <a:latin typeface="Arial"/>
                         </a:rPr>
+                        <a:t>1</a:t>
+                      </a:r>
+                    </a:p>
+                  </a:txBody>
+                  <a:tcPr marL="27432" marR="27432" marT="0" marB="0">
+                    <a:solidFill>
+                      <a:srgbClr val="FFFFFF"/>
+                    </a:solidFill>
+                    <a:lnL w="9000" cap="flat" cmpd="sng" algn="ctr">
+                      <a:solidFill>
+                        <a:srgbClr val="D8DEE7"/>
+                      </a:solidFill>
+                      <a:prstDash val="solid"/>
+                    </a:lnL>
+                    <a:lnR w="9000" cap="flat" cmpd="sng" algn="ctr">
+                      <a:solidFill>
+                        <a:srgbClr val="D8DEE7"/>
+                      </a:solidFill>
+                      <a:prstDash val="solid"/>
+                    </a:lnR>
+                    <a:lnT w="9000" cap="flat" cmpd="sng" algn="ctr">
+                      <a:solidFill>
+                        <a:srgbClr val="D8DEE7"/>
+                      </a:solidFill>
+                      <a:prstDash val="solid"/>
+                    </a:lnT>
+                    <a:lnB w="9000" cap="flat" cmpd="sng" algn="ctr">
+                      <a:solidFill>
+                        <a:srgbClr val="D8DEE7"/>
+                      </a:solidFill>
+                      <a:prstDash val="solid"/>
+                    </a:lnB>
+                  </a:tcPr>
+                </a:tc>
+                <a:tc>
+                  <a:txBody>
+                    <a:bodyPr lIns="27432" rIns="27432" tIns="0" bIns="0" anchor="ctr"/>
+                    <a:lstStyle/>
+                    <a:p>
+                      <a:pPr algn="ctr"/>
+                      <a:r>
+                        <a:rPr sz="1050" b="1">
+                          <a:solidFill>
+                            <a:srgbClr val="20252B"/>
+                          </a:solidFill>
+                          <a:latin typeface="Arial"/>
+                        </a:rPr>
                         <a:t>2</a:t>
                       </a:r>
                     </a:p>
@@ -26458,60 +26505,13 @@
                     <a:p>
                       <a:pPr algn="ctr"/>
                       <a:r>
-                        <a:rPr sz="1050" b="1">
-                          <a:solidFill>
-                            <a:srgbClr val="20252B"/>
-                          </a:solidFill>
-                          <a:latin typeface="Arial"/>
-                        </a:rPr>
-                        <a:t>4</a:t>
-                      </a:r>
-                    </a:p>
-                  </a:txBody>
-                  <a:tcPr marL="27432" marR="27432" marT="0" marB="0">
-                    <a:solidFill>
-                      <a:srgbClr val="FFFFFF"/>
-                    </a:solidFill>
-                    <a:lnL w="9000" cap="flat" cmpd="sng" algn="ctr">
-                      <a:solidFill>
-                        <a:srgbClr val="D8DEE7"/>
-                      </a:solidFill>
-                      <a:prstDash val="solid"/>
-                    </a:lnL>
-                    <a:lnR w="9000" cap="flat" cmpd="sng" algn="ctr">
-                      <a:solidFill>
-                        <a:srgbClr val="D8DEE7"/>
-                      </a:solidFill>
-                      <a:prstDash val="solid"/>
-                    </a:lnR>
-                    <a:lnT w="9000" cap="flat" cmpd="sng" algn="ctr">
-                      <a:solidFill>
-                        <a:srgbClr val="D8DEE7"/>
-                      </a:solidFill>
-                      <a:prstDash val="solid"/>
-                    </a:lnT>
-                    <a:lnB w="9000" cap="flat" cmpd="sng" algn="ctr">
-                      <a:solidFill>
-                        <a:srgbClr val="D8DEE7"/>
-                      </a:solidFill>
-                      <a:prstDash val="solid"/>
-                    </a:lnB>
-                  </a:tcPr>
-                </a:tc>
-                <a:tc>
-                  <a:txBody>
-                    <a:bodyPr lIns="27432" rIns="27432" tIns="0" bIns="0" anchor="ctr"/>
-                    <a:lstStyle/>
-                    <a:p>
-                      <a:pPr algn="ctr"/>
-                      <a:r>
                         <a:rPr sz="1050" b="0">
                           <a:solidFill>
                             <a:srgbClr val="687386"/>
                           </a:solidFill>
                           <a:latin typeface="Arial"/>
                         </a:rPr>
-                        <a:t>2,0</a:t>
+                        <a:t>1,0</a:t>
                       </a:r>
                     </a:p>
                   </a:txBody>
@@ -27489,7 +27489,7 @@
                           </a:solidFill>
                           <a:latin typeface="Arial"/>
                         </a:rPr>
-                        <a:t>DARUSSALAM</a:t>
+                        <a:t>Abdul Minhaq</a:t>
                       </a:r>
                     </a:p>
                   </a:txBody>
@@ -27536,7 +27536,7 @@
                           </a:solidFill>
                           <a:latin typeface="Arial"/>
                         </a:rPr>
-                        <a:t>Lombok</a:t>
+                        <a:t>Sumbawa Barat - Sumbawa Timur</a:t>
                       </a:r>
                     </a:p>
                   </a:txBody>
@@ -27773,7 +27773,7 @@
                           </a:solidFill>
                           <a:latin typeface="Arial"/>
                         </a:rPr>
-                        <a:t>Abdul Minhaq</a:t>
+                        <a:t>DARUSSALAM</a:t>
                       </a:r>
                     </a:p>
                   </a:txBody>
@@ -27820,7 +27820,7 @@
                           </a:solidFill>
                           <a:latin typeface="Arial"/>
                         </a:rPr>
-                        <a:t>Sumbawa Barat - Sumbawa Timur</a:t>
+                        <a:t>Lombok</a:t>
                       </a:r>
                     </a:p>
                   </a:txBody>
@@ -29193,7 +29193,7 @@
                           </a:solidFill>
                           <a:latin typeface="Arial"/>
                         </a:rPr>
-                        <a:t>MOH. DEDY HARTONO</a:t>
+                        <a:t>Abdul Hanan</a:t>
                       </a:r>
                     </a:p>
                   </a:txBody>
@@ -29477,7 +29477,7 @@
                           </a:solidFill>
                           <a:latin typeface="Arial"/>
                         </a:rPr>
-                        <a:t>Abdul Hanan</a:t>
+                        <a:t>Ahmad Yani</a:t>
                       </a:r>
                     </a:p>
                   </a:txBody>
@@ -30418,7 +30418,7 @@
                           </a:solidFill>
                           <a:latin typeface="Arial"/>
                         </a:rPr>
-                        <a:t>IMAM BUDIYANSYAH</a:t>
+                        <a:t>Aprillinda Wulandary</a:t>
                       </a:r>
                     </a:p>
                   </a:txBody>
@@ -30512,7 +30512,7 @@
                           </a:solidFill>
                           <a:latin typeface="Arial"/>
                         </a:rPr>
-                        <a:t>2</a:t>
+                        <a:t>1</a:t>
                       </a:r>
                     </a:p>
                   </a:txBody>
@@ -30606,7 +30606,7 @@
                           </a:solidFill>
                           <a:latin typeface="Arial"/>
                         </a:rPr>
-                        <a:t>-2,0</a:t>
+                        <a:t>-1,0</a:t>
                       </a:r>
                     </a:p>
                   </a:txBody>
@@ -30702,7 +30702,7 @@
                           </a:solidFill>
                           <a:latin typeface="Arial"/>
                         </a:rPr>
-                        <a:t>Suryani</a:t>
+                        <a:t>IMAM BUDIYANSYAH</a:t>
                       </a:r>
                     </a:p>
                   </a:txBody>
@@ -30796,7 +30796,7 @@
                           </a:solidFill>
                           <a:latin typeface="Arial"/>
                         </a:rPr>
-                        <a:t>1</a:t>
+                        <a:t>2</a:t>
                       </a:r>
                     </a:p>
                   </a:txBody>
@@ -30890,7 +30890,7 @@
                           </a:solidFill>
                           <a:latin typeface="Arial"/>
                         </a:rPr>
-                        <a:t>-1,0</a:t>
+                        <a:t>-2,0</a:t>
                       </a:r>
                     </a:p>
                   </a:txBody>
@@ -30986,7 +30986,7 @@
                           </a:solidFill>
                           <a:latin typeface="Arial"/>
                         </a:rPr>
-                        <a:t>PUPUT APRILISIA S</a:t>
+                        <a:t>Suryani</a:t>
                       </a:r>
                     </a:p>
                   </a:txBody>
@@ -31270,7 +31270,7 @@
                           </a:solidFill>
                           <a:latin typeface="Arial"/>
                         </a:rPr>
-                        <a:t>YULIANA SAWITRI</a:t>
+                        <a:t>PUPUT APRILISIA S</a:t>
                       </a:r>
                     </a:p>
                   </a:txBody>
@@ -31554,7 +31554,7 @@
                           </a:solidFill>
                           <a:latin typeface="Arial"/>
                         </a:rPr>
-                        <a:t>Dewi Annama Putri</a:t>
+                        <a:t>YANTI H</a:t>
                       </a:r>
                     </a:p>
                   </a:txBody>
@@ -31838,7 +31838,7 @@
                           </a:solidFill>
                           <a:latin typeface="Arial"/>
                         </a:rPr>
-                        <a:t>Aprillinda Wulandary</a:t>
+                        <a:t>SRI MARLINA</a:t>
                       </a:r>
                     </a:p>
                   </a:txBody>
@@ -31885,7 +31885,7 @@
                           </a:solidFill>
                           <a:latin typeface="Arial"/>
                         </a:rPr>
-                        <a:t>Sumbawa Barat - Sumbawa Timur</a:t>
+                        <a:t>Lombok</a:t>
                       </a:r>
                     </a:p>
                   </a:txBody>
@@ -31932,7 +31932,7 @@
                           </a:solidFill>
                           <a:latin typeface="Arial"/>
                         </a:rPr>
-                        <a:t>1</a:t>
+                        <a:t>2</a:t>
                       </a:r>
                     </a:p>
                   </a:txBody>
@@ -32026,7 +32026,7 @@
                           </a:solidFill>
                           <a:latin typeface="Arial"/>
                         </a:rPr>
-                        <a:t>-1,0</a:t>
+                        <a:t>-2,0</a:t>
                       </a:r>
                     </a:p>
                   </a:txBody>
@@ -32122,7 +32122,7 @@
                           </a:solidFill>
                           <a:latin typeface="Arial"/>
                         </a:rPr>
-                        <a:t>YANTI H</a:t>
+                        <a:t>YULIANA SAWITRI</a:t>
                       </a:r>
                     </a:p>
                   </a:txBody>
@@ -32406,7 +32406,7 @@
                           </a:solidFill>
                           <a:latin typeface="Arial"/>
                         </a:rPr>
-                        <a:t>SRI MARLINA</a:t>
+                        <a:t>Dewi Annama Putri</a:t>
                       </a:r>
                     </a:p>
                   </a:txBody>
@@ -32453,7 +32453,7 @@
                           </a:solidFill>
                           <a:latin typeface="Arial"/>
                         </a:rPr>
-                        <a:t>Lombok</a:t>
+                        <a:t>Sumbawa Barat - Sumbawa Timur</a:t>
                       </a:r>
                     </a:p>
                   </a:txBody>
@@ -32500,7 +32500,7 @@
                           </a:solidFill>
                           <a:latin typeface="Arial"/>
                         </a:rPr>
-                        <a:t>2</a:t>
+                        <a:t>1</a:t>
                       </a:r>
                     </a:p>
                   </a:txBody>
@@ -32594,7 +32594,7 @@
                           </a:solidFill>
                           <a:latin typeface="Arial"/>
                         </a:rPr>
-                        <a:t>-2,0</a:t>
+                        <a:t>-1,0</a:t>
                       </a:r>
                     </a:p>
                   </a:txBody>
@@ -34424,7 +34424,7 @@
                           </a:solidFill>
                           <a:latin typeface="Arial"/>
                         </a:rPr>
-                        <a:t>YULIANA SAWITRI</a:t>
+                        <a:t>YANTI H</a:t>
                       </a:r>
                     </a:p>
                   </a:txBody>
@@ -34708,7 +34708,7 @@
                           </a:solidFill>
                           <a:latin typeface="Arial"/>
                         </a:rPr>
-                        <a:t>INDRAWAN</a:t>
+                        <a:t>SRI MARLINA</a:t>
                       </a:r>
                     </a:p>
                   </a:txBody>
@@ -34802,7 +34802,7 @@
                           </a:solidFill>
                           <a:latin typeface="Arial"/>
                         </a:rPr>
-                        <a:t>1</a:t>
+                        <a:t>2</a:t>
                       </a:r>
                     </a:p>
                   </a:txBody>
@@ -34896,7 +34896,7 @@
                           </a:solidFill>
                           <a:latin typeface="Arial"/>
                         </a:rPr>
-                        <a:t>-1,0</a:t>
+                        <a:t>-2,0</a:t>
                       </a:r>
                     </a:p>
                   </a:txBody>
@@ -34992,7 +34992,7 @@
                           </a:solidFill>
                           <a:latin typeface="Arial"/>
                         </a:rPr>
-                        <a:t>Ida ayu mega dirgantini</a:t>
+                        <a:t>YULIANA SAWITRI</a:t>
                       </a:r>
                     </a:p>
                   </a:txBody>
@@ -35039,7 +35039,7 @@
                           </a:solidFill>
                           <a:latin typeface="Arial"/>
                         </a:rPr>
-                        <a:t>Lombok</a:t>
+                        <a:t>Sumbawa Barat - Sumbawa Timur</a:t>
                       </a:r>
                     </a:p>
                   </a:txBody>
@@ -35276,7 +35276,7 @@
                           </a:solidFill>
                           <a:latin typeface="Arial"/>
                         </a:rPr>
-                        <a:t>HENI RATMAWATI</a:t>
+                        <a:t>GALANG RAMADHAN</a:t>
                       </a:r>
                     </a:p>
                   </a:txBody>
@@ -35370,7 +35370,7 @@
                           </a:solidFill>
                           <a:latin typeface="Arial"/>
                         </a:rPr>
-                        <a:t>1</a:t>
+                        <a:t>2</a:t>
                       </a:r>
                     </a:p>
                   </a:txBody>
@@ -35464,7 +35464,7 @@
                           </a:solidFill>
                           <a:latin typeface="Arial"/>
                         </a:rPr>
-                        <a:t>-1,0</a:t>
+                        <a:t>-2,0</a:t>
                       </a:r>
                     </a:p>
                   </a:txBody>
@@ -35560,7 +35560,7 @@
                           </a:solidFill>
                           <a:latin typeface="Arial"/>
                         </a:rPr>
-                        <a:t>LITA CITRA DEWI</a:t>
+                        <a:t>INDRAWAN</a:t>
                       </a:r>
                     </a:p>
                   </a:txBody>
@@ -35844,7 +35844,7 @@
                           </a:solidFill>
                           <a:latin typeface="Arial"/>
                         </a:rPr>
-                        <a:t>ADY SYAHRIAL</a:t>
+                        <a:t>Tri widyastuti</a:t>
                       </a:r>
                     </a:p>
                   </a:txBody>
@@ -36128,7 +36128,7 @@
                           </a:solidFill>
                           <a:latin typeface="Arial"/>
                         </a:rPr>
-                        <a:t>YANTI H</a:t>
+                        <a:t>Ida ayu mega dirgantini</a:t>
                       </a:r>
                     </a:p>
                   </a:txBody>
@@ -36175,7 +36175,7 @@
                           </a:solidFill>
                           <a:latin typeface="Arial"/>
                         </a:rPr>
-                        <a:t>Sumbawa Barat - Sumbawa Timur</a:t>
+                        <a:t>Lombok</a:t>
                       </a:r>
                     </a:p>
                   </a:txBody>
